--- a/metro/metro-f09-seller-tip.pptx
+++ b/metro/metro-f09-seller-tip.pptx
@@ -3778,9 +3778,9 @@
                 <a:solidFill>
                   <a:srgbClr val="FFFFFF"/>
                 </a:solidFill>
-                <a:latin typeface="Space Grotesk"/>
-                <a:ea typeface="Space Grotesk"/>
-                <a:cs typeface="Space Grotesk"/>
+                <a:latin typeface="HK Grotesk"/>
+                <a:ea typeface="HK Grotesk"/>
+                <a:cs typeface="HK Grotesk"/>
               </a:rPr>
               <a:t>NO</a:t>
             </a:r>
@@ -3817,9 +3817,9 @@
                 <a:solidFill>
                   <a:srgbClr val="FFFFFF"/>
                 </a:solidFill>
-                <a:latin typeface="Space Grotesk"/>
-                <a:ea typeface="Space Grotesk"/>
-                <a:cs typeface="Space Grotesk"/>
+                <a:latin typeface="HK Grotesk"/>
+                <a:ea typeface="HK Grotesk"/>
+                <a:cs typeface="HK Grotesk"/>
               </a:rPr>
               <a:t>North &amp; Oak</a:t>
             </a:r>
@@ -3961,9 +3961,9 @@
                 <a:solidFill>
                   <a:srgbClr val="FFFFFF"/>
                 </a:solidFill>
-                <a:latin typeface="Space Grotesk"/>
-                <a:ea typeface="Space Grotesk"/>
-                <a:cs typeface="Space Grotesk"/>
+                <a:latin typeface="HK Grotesk"/>
+                <a:ea typeface="HK Grotesk"/>
+                <a:cs typeface="HK Grotesk"/>
               </a:rPr>
               <a:t>Stage the first ten feet.</a:t>
             </a:r>
@@ -4000,9 +4000,9 @@
                 <a:solidFill>
                   <a:srgbClr val="D5D5D6"/>
                 </a:solidFill>
-                <a:latin typeface="Space Grotesk"/>
-                <a:ea typeface="Space Grotesk"/>
-                <a:cs typeface="Space Grotesk"/>
+                <a:latin typeface="HK Grotesk"/>
+                <a:ea typeface="HK Grotesk"/>
+                <a:cs typeface="HK Grotesk"/>
               </a:rPr>
               <a:t>Buyers decide in the doorway. Clear the entry, add one warm light and a single sculptural object, and let the sightline run clean to the windows. The first ten feet set the price expectation for everything behind them.</a:t>
             </a:r>
@@ -4035,9 +4035,9 @@
                 <a:solidFill>
                   <a:srgbClr val="A1A2A3"/>
                 </a:solidFill>
-                <a:latin typeface="Space Grotesk"/>
-                <a:ea typeface="Space Grotesk"/>
-                <a:cs typeface="Space Grotesk"/>
+                <a:latin typeface="HK Grotesk"/>
+                <a:ea typeface="HK Grotesk"/>
+                <a:cs typeface="HK Grotesk"/>
               </a:rPr>
               <a:t>— A note from Julian Reyes</a:t>
             </a:r>
